--- a/AX_2027_FDE.pptx
+++ b/AX_2027_FDE.pptx
@@ -3362,7 +3362,7 @@
                 <a:ea typeface="맑은 고딕" pitchFamily="34" charset="-122"/>
                 <a:cs typeface="맑은 고딕" pitchFamily="34" charset="-120"/>
               </a:rPr>
-              <a:t>FD(AX컨설팅)가 문제정의·업무 재설계·KPI를 주도하고, PRD 담당 부서가 Agent 구축부터 운영 이관까지 책임지는 FDE 조직으로 '운영 안착'까지 실행 전환을 완결함</a:t>
+              <a:t>현업이 공동 발의·투자하고 FD가 문제정의·KPI를, PRD가 구축·AI Ops 이관을 책임지며, 월간 가치 리뷰의 실측 ROI를 다음 투자 Gate에 반영하는 FDE 실행 체계</a:t>
             </a:r>
             <a:endParaRPr lang="en-US" sz="1400" dirty="0"/>
           </a:p>
@@ -3682,7 +3682,7 @@
                 <a:ea typeface="맑은 고딕" pitchFamily="34" charset="-122"/>
                 <a:cs typeface="맑은 고딕" pitchFamily="34" charset="-120"/>
               </a:rPr>
-              <a:t>거버넌스</a:t>
+              <a:t>AX 협의체</a:t>
             </a:r>
             <a:endParaRPr lang="en-US" sz="1100" dirty="0"/>
           </a:p>
@@ -3746,8 +3746,8 @@
         </p:nvSpPr>
         <p:spPr>
           <a:xfrm>
-            <a:off x="2372868" y="1920240"/>
-            <a:ext cx="1536192" cy="310896"/>
+            <a:off x="1869948" y="1920240"/>
+            <a:ext cx="2039112" cy="310896"/>
           </a:xfrm>
           <a:prstGeom prst="rect">
             <a:avLst/>
@@ -3771,7 +3771,7 @@
                 <a:ea typeface="맑은 고딕" pitchFamily="34" charset="-122"/>
                 <a:cs typeface="맑은 고딕" pitchFamily="34" charset="-120"/>
               </a:rPr>
-              <a:t>G1 과제 선정 심의</a:t>
+              <a:t>G1 현업 공동 발의·투자 승인</a:t>
             </a:r>
             <a:endParaRPr lang="en-US" sz="950" dirty="0"/>
           </a:p>
@@ -3810,8 +3810,8 @@
         </p:nvSpPr>
         <p:spPr>
           <a:xfrm>
-            <a:off x="4974336" y="1920240"/>
-            <a:ext cx="1536192" cy="310896"/>
+            <a:off x="4471416" y="1920240"/>
+            <a:ext cx="2039112" cy="310896"/>
           </a:xfrm>
           <a:prstGeom prst="rect">
             <a:avLst/>
@@ -3835,7 +3835,7 @@
                 <a:ea typeface="맑은 고딕" pitchFamily="34" charset="-122"/>
                 <a:cs typeface="맑은 고딕" pitchFamily="34" charset="-120"/>
               </a:rPr>
-              <a:t>G2 투자·보안 승인</a:t>
+              <a:t>G2 투자·보안 승인 (실측 ROI)</a:t>
             </a:r>
             <a:endParaRPr lang="en-US" sz="950" dirty="0"/>
           </a:p>
@@ -3874,8 +3874,8 @@
         </p:nvSpPr>
         <p:spPr>
           <a:xfrm>
-            <a:off x="7575804" y="1920240"/>
-            <a:ext cx="1536192" cy="310896"/>
+            <a:off x="7072884" y="1920240"/>
+            <a:ext cx="2039112" cy="310896"/>
           </a:xfrm>
           <a:prstGeom prst="rect">
             <a:avLst/>
@@ -3899,7 +3899,7 @@
                 <a:ea typeface="맑은 고딕" pitchFamily="34" charset="-122"/>
                 <a:cs typeface="맑은 고딕" pitchFamily="34" charset="-120"/>
               </a:rPr>
-              <a:t>G3 운영 전환 승인</a:t>
+              <a:t>G3 운영 전환 승인 (AI Ops)</a:t>
             </a:r>
             <a:endParaRPr lang="en-US" sz="950" dirty="0"/>
           </a:p>
@@ -3913,8 +3913,8 @@
         </p:nvSpPr>
         <p:spPr>
           <a:xfrm>
-            <a:off x="1581912" y="1920240"/>
-            <a:ext cx="822960" cy="310896"/>
+            <a:off x="9541764" y="1920240"/>
+            <a:ext cx="2235708" cy="310896"/>
           </a:xfrm>
           <a:prstGeom prst="rect">
             <a:avLst/>
@@ -3930,15 +3930,15 @@
               <a:buNone/>
             </a:pPr>
             <a:r>
-              <a:rPr lang="en-US" sz="950" dirty="0">
-                <a:solidFill>
-                  <a:srgbClr val="6E6E6E"/>
-                </a:solidFill>
-                <a:latin typeface="맑은 고딕" pitchFamily="34" charset="0"/>
-                <a:ea typeface="맑은 고딕" pitchFamily="34" charset="-122"/>
-                <a:cs typeface="맑은 고딕" pitchFamily="34" charset="-120"/>
-              </a:rPr>
-              <a:t>AX 협의체</a:t>
+              <a:rPr lang="en-US" sz="950" b="1" dirty="0">
+                <a:solidFill>
+                  <a:srgbClr val="D7281E"/>
+                </a:solidFill>
+                <a:latin typeface="맑은 고딕" pitchFamily="34" charset="0"/>
+                <a:ea typeface="맑은 고딕" pitchFamily="34" charset="-122"/>
+                <a:cs typeface="맑은 고딕" pitchFamily="34" charset="-120"/>
+              </a:rPr>
+              <a:t>월간 포트폴리오 리뷰 (개선·중단)</a:t>
             </a:r>
             <a:endParaRPr lang="en-US" sz="950" dirty="0"/>
           </a:p>
@@ -4065,11 +4065,11 @@
             <a:avLst/>
           </a:prstGeom>
           <a:solidFill>
-            <a:srgbClr val="FFFFFF"/>
+            <a:srgbClr val="FBECEB"/>
           </a:solidFill>
-          <a:ln w="12700">
+          <a:ln w="19050">
             <a:solidFill>
-              <a:srgbClr val="8FAAD0"/>
+              <a:srgbClr val="D7281E"/>
             </a:solidFill>
             <a:prstDash val="solid"/>
           </a:ln>
@@ -4108,7 +4108,7 @@
                 <a:ea typeface="맑은 고딕" pitchFamily="34" charset="-122"/>
                 <a:cs typeface="맑은 고딕" pitchFamily="34" charset="-120"/>
               </a:rPr>
-              <a:t>현황 분석</a:t>
+              <a:t>현업 공동 발의·현황 분석</a:t>
             </a:r>
             <a:endParaRPr lang="en-US" sz="1100" dirty="0"/>
           </a:p>
@@ -4125,7 +4125,7 @@
                 <a:ea typeface="맑은 고딕" pitchFamily="34" charset="-122"/>
                 <a:cs typeface="맑은 고딕" pitchFamily="34" charset="-120"/>
               </a:rPr>
-              <a:t>경영진·실무자 의견 청취</a:t>
+              <a:t>현업 부서 공동 발의·의견 청취</a:t>
             </a:r>
             <a:endParaRPr lang="en-US" sz="1100" dirty="0"/>
           </a:p>
@@ -4837,7 +4837,7 @@
                 <a:ea typeface="맑은 고딕" pitchFamily="34" charset="-122"/>
                 <a:cs typeface="맑은 고딕" pitchFamily="34" charset="-120"/>
               </a:rPr>
-              <a:t>성과 실측(Value Tracking)</a:t>
+              <a:t>월간 가치 리뷰(Value Tracking)</a:t>
             </a:r>
             <a:endParaRPr lang="en-US" sz="1100" dirty="0"/>
           </a:p>
@@ -4854,7 +4854,7 @@
                 <a:ea typeface="맑은 고딕" pitchFamily="34" charset="-122"/>
                 <a:cs typeface="맑은 고딕" pitchFamily="34" charset="-120"/>
               </a:rPr>
-              <a:t>KPI 실측·ROI 검증</a:t>
+              <a:t>KPI 실측·개선/중단 → G2 입력</a:t>
             </a:r>
             <a:endParaRPr lang="en-US" sz="1100" dirty="0"/>
           </a:p>
@@ -4918,7 +4918,7 @@
                 <a:ea typeface="맑은 고딕" pitchFamily="34" charset="-122"/>
                 <a:cs typeface="맑은 고딕" pitchFamily="34" charset="-120"/>
               </a:rPr>
-              <a:t>확산 과제 발굴(Next Wave)</a:t>
+              <a:t>현업 발의 트랙 운영</a:t>
             </a:r>
             <a:endParaRPr lang="en-US" sz="1100" dirty="0"/>
           </a:p>
@@ -4935,7 +4935,7 @@
                 <a:ea typeface="맑은 고딕" pitchFamily="34" charset="-122"/>
                 <a:cs typeface="맑은 고딕" pitchFamily="34" charset="-120"/>
               </a:rPr>
-              <a:t>타 계열사·유사 업무 확장</a:t>
+              <a:t>Hypercare 이후 현업 자체 발의</a:t>
             </a:r>
             <a:endParaRPr lang="en-US" sz="1100" dirty="0"/>
           </a:p>
@@ -5876,11 +5876,11 @@
             <a:avLst/>
           </a:prstGeom>
           <a:solidFill>
-            <a:srgbClr val="FFFFFF"/>
+            <a:srgbClr val="FBECEB"/>
           </a:solidFill>
-          <a:ln w="12700">
+          <a:ln w="19050">
             <a:solidFill>
-              <a:srgbClr val="2E75B6"/>
+              <a:srgbClr val="D7281E"/>
             </a:solidFill>
             <a:prstDash val="solid"/>
           </a:ln>
@@ -5919,7 +5919,7 @@
                 <a:ea typeface="맑은 고딕" pitchFamily="34" charset="-122"/>
                 <a:cs typeface="맑은 고딕" pitchFamily="34" charset="-120"/>
               </a:rPr>
-              <a:t>테스트 및 품질 검증</a:t>
+              <a:t>테스트·품질 검증</a:t>
             </a:r>
             <a:endParaRPr lang="en-US" sz="1100" dirty="0"/>
           </a:p>
@@ -5936,7 +5936,7 @@
                 <a:ea typeface="맑은 고딕" pitchFamily="34" charset="-122"/>
                 <a:cs typeface="맑은 고딕" pitchFamily="34" charset="-120"/>
               </a:rPr>
-              <a:t>성능·보안·안정성</a:t>
+              <a:t>CI/CD·프롬프트 레지스트리</a:t>
             </a:r>
             <a:endParaRPr lang="en-US" sz="1100" dirty="0"/>
           </a:p>
@@ -6000,7 +6000,7 @@
                 <a:ea typeface="맑은 고딕" pitchFamily="34" charset="-122"/>
                 <a:cs typeface="맑은 고딕" pitchFamily="34" charset="-120"/>
               </a:rPr>
-              <a:t>운영 이관·Hypercare</a:t>
+              <a:t>운영 이관·AI Ops</a:t>
             </a:r>
             <a:endParaRPr lang="en-US" sz="1100" dirty="0"/>
           </a:p>
@@ -6017,7 +6017,7 @@
                 <a:ea typeface="맑은 고딕" pitchFamily="34" charset="-122"/>
                 <a:cs typeface="맑은 고딕" pitchFamily="34" charset="-120"/>
               </a:rPr>
-              <a:t>현업 Owner 인계·안정화</a:t>
+              <a:t>모니터링·드리프트·장애대응·단위비용</a:t>
             </a:r>
             <a:endParaRPr lang="en-US" sz="1100" dirty="0"/>
           </a:p>
@@ -6418,7 +6418,7 @@
                 <a:ea typeface="맑은 고딕" pitchFamily="34" charset="-122"/>
                 <a:cs typeface="맑은 고딕" pitchFamily="34" charset="-120"/>
               </a:rPr>
-              <a:t>운영 이관서, 성과 리포트, 재사용 Asset</a:t>
+              <a:t>운영 이관서(AI Ops 체크리스트), 월간 성과 리포트</a:t>
             </a:r>
             <a:endParaRPr lang="en-US" sz="950" dirty="0"/>
           </a:p>
